--- a/materialien/Videos/01_Caesar_und_Modulo/KR_Video_01_Caesar_und_Modulo_Folien.pptx
+++ b/materialien/Videos/01_Caesar_und_Modulo/KR_Video_01_Caesar_und_Modulo_Folien.pptx
@@ -123,70 +123,70 @@
   <p:extLst>
     <p:ext uri="{521415D9-36F7-43E2-AB2F-B90AF26B5E84}">
       <p14:sectionLst xmlns:p14="http://schemas.microsoft.com/office/powerpoint/2010/main">
-        <p14:section name="Einstieg" id="{6526a0e1-ab0d-54ee-2c6a-e9ef4ac67163}">
+        <p14:section name="Einstieg" id="{77526a50-c516-a5d9-b689-80087ab8506f}">
           <p14:sldIdLst>
             <p14:sldId id="256"/>
             <p14:sldId id="257"/>
           </p14:sldIdLst>
         </p14:section>
-        <p14:section name="Grundbegriffe" id="{3d84c16c-1db7-a110-9ef2-fdca5f6a39c8}">
+        <p14:section name="Grundbegriffe" id="{2039fb4f-f37d-aa5b-eb38-5cb8e8f9b1f3}">
           <p14:sldIdLst>
             <p14:sldId id="258"/>
           </p14:sldIdLst>
         </p14:section>
-        <p14:section name="Das Caesar-Verfahren" id="{0fc84fae-9ad0-306f-6cab-c423836ff186}">
+        <p14:section name="Das Caesar-Verfahren" id="{7d00b84d-0632-cb15-8d17-34a067f0ce22}">
           <p14:sldIdLst>
             <p14:sldId id="259"/>
           </p14:sldIdLst>
         </p14:section>
-        <p14:section name="Alphabet A = 1" id="{d293da24-4080-a3f7-ac45-b1b45b1f3a00}">
+        <p14:section name="Alphabet A = 1" id="{a2dfa475-f682-6e5d-ecd0-7fce1eccd44e}">
           <p14:sldIdLst>
             <p14:sldId id="260"/>
           </p14:sldIdLst>
         </p14:section>
-        <p14:section name="Verschlüsseln" id="{da55ea52-f37a-1171-893a-0bf0f60ba5ee}">
+        <p14:section name="Verschlüsseln" id="{2f38a3dc-32e2-a230-bb63-3b31d6b04273}">
           <p14:sldIdLst>
             <p14:sldId id="261"/>
           </p14:sldIdLst>
         </p14:section>
-        <p14:section name="Modulo" id="{6fb1e25b-b8cb-ba8f-c310-16fad63e6157}">
+        <p14:section name="Modulo" id="{90236574-fd83-1864-45fa-1a1f728a90be}">
           <p14:sldIdLst>
             <p14:sldId id="262"/>
           </p14:sldIdLst>
         </p14:section>
-        <p14:section name="Die Formel" id="{674d7a8d-e777-fab8-9aa1-b11fc7379f17}">
+        <p14:section name="Die Formel" id="{4371812a-834f-56fb-e36c-beba69bde3e5}">
           <p14:sldIdLst>
             <p14:sldId id="263"/>
           </p14:sldIdLst>
         </p14:section>
-        <p14:section name="Fallen beim Rechnen" id="{32cb4def-70c3-0bcd-0e34-3aa11219018c}">
+        <p14:section name="Fallen beim Rechnen" id="{08a649d5-390e-4511-7197-742e89b4ca9f}">
           <p14:sldIdLst>
             <p14:sldId id="264"/>
           </p14:sldIdLst>
         </p14:section>
-        <p14:section name="Selbst ausprobieren" id="{5bcb2a09-e7c2-6da9-4125-769b3a8be308}">
+        <p14:section name="Selbst ausprobieren" id="{1c8777b3-fdc9-5345-9211-0d27e11829b2}">
           <p14:sldIdLst>
             <p14:sldId id="265"/>
             <p14:sldId id="266"/>
             <p14:sldId id="267"/>
           </p14:sldIdLst>
         </p14:section>
-        <p14:section name="Brute Force" id="{882dad01-b310-4210-7f71-cb5e06afae90}">
+        <p14:section name="Brute Force" id="{9afb9405-e3b8-3b29-7476-3d0001b6cb48}">
           <p14:sldIdLst>
             <p14:sldId id="268"/>
           </p14:sldIdLst>
         </p14:section>
-        <p14:section name="Sicherheit beurteilen" id="{f4a4b0fa-4f38-6f36-c02e-f57099dfb278}">
+        <p14:section name="Sicherheit beurteilen" id="{ccdbca2f-b447-e04b-991e-fc1f6c53ab46}">
           <p14:sldIdLst>
             <p14:sldId id="269"/>
           </p14:sldIdLst>
         </p14:section>
-        <p14:section name="Typische Fehler" id="{76bd23ec-efcc-b9c4-beda-30483984e260}">
+        <p14:section name="Typische Fehler" id="{deee7cfc-d1d7-db8f-9eec-296f2946f176}">
           <p14:sldIdLst>
             <p14:sldId id="270"/>
           </p14:sldIdLst>
         </p14:section>
-        <p14:section name="Zusammenfassung" id="{44072b19-3803-3499-f8a2-a7da9593b068}">
+        <p14:section name="Zusammenfassung" id="{75145860-1f9e-89e2-075b-1c35ed722e3a}">
           <p14:sldIdLst>
             <p14:sldId id="271"/>
             <p14:sldId id="272"/>
@@ -7812,7 +7812,7 @@
         <p:spPr>
           <a:xfrm>
             <a:off x="548640" y="1325880"/>
-            <a:ext cx="11094415" cy="773176"/>
+            <a:ext cx="7315200" cy="711200"/>
           </a:xfrm>
           <a:prstGeom prst="rect">
             <a:avLst/>
@@ -7828,14 +7828,14 @@
               <a:buNone/>
             </a:pPr>
             <a:r>
-              <a:rPr lang="en-US" sz="2200" dirty="0">
+              <a:rPr lang="en-US" sz="2000" dirty="0">
                 <a:solidFill>
                   <a:srgbClr val="1B1B1F"/>
                 </a:solidFill>
               </a:rPr>
               <a:t>Entschlüsseln heißt umkehren: jeden Schritt rückwärts – bei mehreren Stufen in umgekehrter Reihenfolge.</a:t>
             </a:r>
-            <a:endParaRPr lang="en-US" sz="2200" dirty="0"/>
+            <a:endParaRPr lang="en-US" sz="2000" dirty="0"/>
           </a:p>
         </p:txBody>
       </p:sp>
@@ -7847,12 +7847,12 @@
         </p:nvSpPr>
         <p:spPr>
           <a:xfrm>
-            <a:off x="548640" y="2281936"/>
-            <a:ext cx="5364328" cy="1943608"/>
+            <a:off x="548640" y="2219960"/>
+            <a:ext cx="3474720" cy="2625344"/>
           </a:xfrm>
           <a:prstGeom prst="roundRect">
             <a:avLst>
-              <a:gd name="adj" fmla="val 3764"/>
+              <a:gd name="adj" fmla="val 2786"/>
             </a:avLst>
           </a:prstGeom>
           <a:solidFill>
@@ -7874,8 +7874,8 @@
         </p:nvSpPr>
         <p:spPr>
           <a:xfrm>
-            <a:off x="822960" y="2464816"/>
-            <a:ext cx="4815688" cy="365760"/>
+            <a:off x="822960" y="2402840"/>
+            <a:ext cx="2926080" cy="365760"/>
           </a:xfrm>
           <a:prstGeom prst="rect">
             <a:avLst/>
@@ -7910,8 +7910,8 @@
         </p:nvSpPr>
         <p:spPr>
           <a:xfrm>
-            <a:off x="822960" y="2967736"/>
-            <a:ext cx="4815688" cy="386588"/>
+            <a:off x="822960" y="2905760"/>
+            <a:ext cx="2926080" cy="727456"/>
           </a:xfrm>
           <a:prstGeom prst="rect">
             <a:avLst/>
@@ -7962,8 +7962,8 @@
         </p:nvSpPr>
         <p:spPr>
           <a:xfrm>
-            <a:off x="822960" y="3482340"/>
-            <a:ext cx="4815688" cy="386588"/>
+            <a:off x="822960" y="3761232"/>
+            <a:ext cx="2926080" cy="727456"/>
           </a:xfrm>
           <a:prstGeom prst="rect">
             <a:avLst/>
@@ -8017,12 +8017,12 @@
         </p:nvSpPr>
         <p:spPr>
           <a:xfrm>
-            <a:off x="6278728" y="2281936"/>
-            <a:ext cx="5364328" cy="3139948"/>
+            <a:off x="4389120" y="2219960"/>
+            <a:ext cx="3474720" cy="3821684"/>
           </a:xfrm>
           <a:prstGeom prst="roundRect">
             <a:avLst>
-              <a:gd name="adj" fmla="val 2330"/>
+              <a:gd name="adj" fmla="val 2105"/>
             </a:avLst>
           </a:prstGeom>
           <a:solidFill>
@@ -8044,8 +8044,8 @@
         </p:nvSpPr>
         <p:spPr>
           <a:xfrm>
-            <a:off x="6553048" y="2464816"/>
-            <a:ext cx="4815688" cy="365760"/>
+            <a:off x="4663440" y="2402840"/>
+            <a:ext cx="2926080" cy="365760"/>
           </a:xfrm>
           <a:prstGeom prst="rect">
             <a:avLst/>
@@ -8080,8 +8080,8 @@
         </p:nvSpPr>
         <p:spPr>
           <a:xfrm>
-            <a:off x="6553048" y="2967736"/>
-            <a:ext cx="4815688" cy="727456"/>
+            <a:off x="4663440" y="2905760"/>
+            <a:ext cx="2926080" cy="727456"/>
           </a:xfrm>
           <a:prstGeom prst="rect">
             <a:avLst/>
@@ -8140,8 +8140,8 @@
         </p:nvSpPr>
         <p:spPr>
           <a:xfrm>
-            <a:off x="6553048" y="3823208"/>
-            <a:ext cx="4815688" cy="386588"/>
+            <a:off x="4663440" y="3761232"/>
+            <a:ext cx="2926080" cy="727456"/>
           </a:xfrm>
           <a:prstGeom prst="rect">
             <a:avLst/>
@@ -8184,8 +8184,8 @@
         </p:nvSpPr>
         <p:spPr>
           <a:xfrm>
-            <a:off x="6553048" y="4337812"/>
-            <a:ext cx="4815688" cy="727456"/>
+            <a:off x="4663440" y="4616704"/>
+            <a:ext cx="2926080" cy="1068324"/>
           </a:xfrm>
           <a:prstGeom prst="rect">
             <a:avLst/>
@@ -8416,7 +8416,7 @@
                         <a:buNone/>
                       </a:pPr>
                       <a:r>
-                        <a:rPr lang="en-US" sz="1300" b="1" dirty="0">
+                        <a:rPr lang="en-US" sz="1200" b="1" dirty="0">
                           <a:solidFill>
                             <a:srgbClr val="1B1B1F"/>
                           </a:solidFill>
@@ -8426,7 +8426,7 @@
                         </a:rPr>
                         <a:t>k</a:t>
                       </a:r>
-                      <a:endParaRPr lang="en-US" sz="1300" dirty="0">
+                      <a:endParaRPr lang="en-US" sz="1200" dirty="0">
                         <a:latin typeface="Calibri" charset="0"/>
                         <a:ea typeface="Calibri" charset="0"/>
                         <a:cs typeface="Calibri" charset="0"/>
@@ -8484,7 +8484,7 @@
                         <a:buNone/>
                       </a:pPr>
                       <a:r>
-                        <a:rPr lang="en-US" sz="1300" b="1" dirty="0">
+                        <a:rPr lang="en-US" sz="1200" b="1" dirty="0">
                           <a:solidFill>
                             <a:srgbClr val="1B1B1F"/>
                           </a:solidFill>
@@ -8494,7 +8494,7 @@
                         </a:rPr>
                         <a:t>Klartext?</a:t>
                       </a:r>
-                      <a:endParaRPr lang="en-US" sz="1300" dirty="0">
+                      <a:endParaRPr lang="en-US" sz="1200" dirty="0">
                         <a:latin typeface="Calibri" charset="0"/>
                         <a:ea typeface="Calibri" charset="0"/>
                         <a:cs typeface="Calibri" charset="0"/>
@@ -8552,7 +8552,7 @@
                         <a:buNone/>
                       </a:pPr>
                       <a:r>
-                        <a:rPr lang="en-US" sz="1300" b="1" dirty="0">
+                        <a:rPr lang="en-US" sz="1200" b="1" dirty="0">
                           <a:solidFill>
                             <a:srgbClr val="1B1B1F"/>
                           </a:solidFill>
@@ -8562,7 +8562,7 @@
                         </a:rPr>
                         <a:t>k</a:t>
                       </a:r>
-                      <a:endParaRPr lang="en-US" sz="1300" dirty="0">
+                      <a:endParaRPr lang="en-US" sz="1200" dirty="0">
                         <a:latin typeface="Calibri" charset="0"/>
                         <a:ea typeface="Calibri" charset="0"/>
                         <a:cs typeface="Calibri" charset="0"/>
@@ -8620,7 +8620,7 @@
                         <a:buNone/>
                       </a:pPr>
                       <a:r>
-                        <a:rPr lang="en-US" sz="1300" b="1" dirty="0">
+                        <a:rPr lang="en-US" sz="1200" b="1" dirty="0">
                           <a:solidFill>
                             <a:srgbClr val="1B1B1F"/>
                           </a:solidFill>
@@ -8630,7 +8630,7 @@
                         </a:rPr>
                         <a:t>Klartext?</a:t>
                       </a:r>
-                      <a:endParaRPr lang="en-US" sz="1300" dirty="0">
+                      <a:endParaRPr lang="en-US" sz="1200" dirty="0">
                         <a:latin typeface="Calibri" charset="0"/>
                         <a:ea typeface="Calibri" charset="0"/>
                         <a:cs typeface="Calibri" charset="0"/>
@@ -8690,7 +8690,7 @@
                         <a:buNone/>
                       </a:pPr>
                       <a:r>
-                        <a:rPr lang="en-US" sz="1300" dirty="0">
+                        <a:rPr lang="en-US" sz="1200" dirty="0">
                           <a:solidFill>
                             <a:srgbClr val="1B1B1F"/>
                           </a:solidFill>
@@ -8700,7 +8700,7 @@
                         </a:rPr>
                         <a:t>0</a:t>
                       </a:r>
-                      <a:endParaRPr lang="en-US" sz="1300" dirty="0">
+                      <a:endParaRPr lang="en-US" sz="1200" dirty="0">
                         <a:latin typeface="Calibri" charset="0"/>
                         <a:ea typeface="Calibri" charset="0"/>
                         <a:cs typeface="Calibri" charset="0"/>
@@ -8758,7 +8758,7 @@
                         <a:buNone/>
                       </a:pPr>
                       <a:r>
-                        <a:rPr lang="en-US" sz="1300" dirty="0">
+                        <a:rPr lang="en-US" sz="1200" dirty="0">
                           <a:solidFill>
                             <a:srgbClr val="1B1B1F"/>
                           </a:solidFill>
@@ -8768,7 +8768,7 @@
                         </a:rPr>
                         <a:t>gtvamptvax</a:t>
                       </a:r>
-                      <a:endParaRPr lang="en-US" sz="1300" dirty="0">
+                      <a:endParaRPr lang="en-US" sz="1200" dirty="0">
                         <a:latin typeface="Calibri" charset="0"/>
                         <a:ea typeface="Calibri" charset="0"/>
                         <a:cs typeface="Calibri" charset="0"/>
@@ -8826,7 +8826,7 @@
                         <a:buNone/>
                       </a:pPr>
                       <a:r>
-                        <a:rPr lang="en-US" sz="1300" dirty="0">
+                        <a:rPr lang="en-US" sz="1200" dirty="0">
                           <a:solidFill>
                             <a:srgbClr val="1B1B1F"/>
                           </a:solidFill>
@@ -8836,7 +8836,7 @@
                         </a:rPr>
                         <a:t>13</a:t>
                       </a:r>
-                      <a:endParaRPr lang="en-US" sz="1300" dirty="0">
+                      <a:endParaRPr lang="en-US" sz="1200" dirty="0">
                         <a:latin typeface="Calibri" charset="0"/>
                         <a:ea typeface="Calibri" charset="0"/>
                         <a:cs typeface="Calibri" charset="0"/>
@@ -8894,7 +8894,7 @@
                         <a:buNone/>
                       </a:pPr>
                       <a:r>
-                        <a:rPr lang="en-US" sz="1300" dirty="0">
+                        <a:rPr lang="en-US" sz="1200" dirty="0">
                           <a:solidFill>
                             <a:srgbClr val="1B1B1F"/>
                           </a:solidFill>
@@ -8904,7 +8904,7 @@
                         </a:rPr>
                         <a:t>tginzcgink</a:t>
                       </a:r>
-                      <a:endParaRPr lang="en-US" sz="1300" dirty="0">
+                      <a:endParaRPr lang="en-US" sz="1200" dirty="0">
                         <a:latin typeface="Calibri" charset="0"/>
                         <a:ea typeface="Calibri" charset="0"/>
                         <a:cs typeface="Calibri" charset="0"/>
@@ -8964,7 +8964,7 @@
                         <a:buNone/>
                       </a:pPr>
                       <a:r>
-                        <a:rPr lang="en-US" sz="1300" dirty="0">
+                        <a:rPr lang="en-US" sz="1200" dirty="0">
                           <a:solidFill>
                             <a:srgbClr val="1B1B1F"/>
                           </a:solidFill>
@@ -8974,7 +8974,7 @@
                         </a:rPr>
                         <a:t>1</a:t>
                       </a:r>
-                      <a:endParaRPr lang="en-US" sz="1300" dirty="0">
+                      <a:endParaRPr lang="en-US" sz="1200" dirty="0">
                         <a:latin typeface="Calibri" charset="0"/>
                         <a:ea typeface="Calibri" charset="0"/>
                         <a:cs typeface="Calibri" charset="0"/>
@@ -9032,7 +9032,7 @@
                         <a:buNone/>
                       </a:pPr>
                       <a:r>
-                        <a:rPr lang="en-US" sz="1300" dirty="0">
+                        <a:rPr lang="en-US" sz="1200" dirty="0">
                           <a:solidFill>
                             <a:srgbClr val="1B1B1F"/>
                           </a:solidFill>
@@ -9042,7 +9042,7 @@
                         </a:rPr>
                         <a:t>fsuzlosuzw</a:t>
                       </a:r>
-                      <a:endParaRPr lang="en-US" sz="1300" dirty="0">
+                      <a:endParaRPr lang="en-US" sz="1200" dirty="0">
                         <a:latin typeface="Calibri" charset="0"/>
                         <a:ea typeface="Calibri" charset="0"/>
                         <a:cs typeface="Calibri" charset="0"/>
@@ -9100,7 +9100,7 @@
                         <a:buNone/>
                       </a:pPr>
                       <a:r>
-                        <a:rPr lang="en-US" sz="1300" dirty="0">
+                        <a:rPr lang="en-US" sz="1200" dirty="0">
                           <a:solidFill>
                             <a:srgbClr val="1B1B1F"/>
                           </a:solidFill>
@@ -9110,7 +9110,7 @@
                         </a:rPr>
                         <a:t>14</a:t>
                       </a:r>
-                      <a:endParaRPr lang="en-US" sz="1300" dirty="0">
+                      <a:endParaRPr lang="en-US" sz="1200" dirty="0">
                         <a:latin typeface="Calibri" charset="0"/>
                         <a:ea typeface="Calibri" charset="0"/>
                         <a:cs typeface="Calibri" charset="0"/>
@@ -9168,7 +9168,7 @@
                         <a:buNone/>
                       </a:pPr>
                       <a:r>
-                        <a:rPr lang="en-US" sz="1300" dirty="0">
+                        <a:rPr lang="en-US" sz="1200" dirty="0">
                           <a:solidFill>
                             <a:srgbClr val="1B1B1F"/>
                           </a:solidFill>
@@ -9178,7 +9178,7 @@
                         </a:rPr>
                         <a:t>sfhmybfhmj</a:t>
                       </a:r>
-                      <a:endParaRPr lang="en-US" sz="1300" dirty="0">
+                      <a:endParaRPr lang="en-US" sz="1200" dirty="0">
                         <a:latin typeface="Calibri" charset="0"/>
                         <a:ea typeface="Calibri" charset="0"/>
                         <a:cs typeface="Calibri" charset="0"/>
@@ -9238,7 +9238,7 @@
                         <a:buNone/>
                       </a:pPr>
                       <a:r>
-                        <a:rPr lang="en-US" sz="1300" dirty="0">
+                        <a:rPr lang="en-US" sz="1200" dirty="0">
                           <a:solidFill>
                             <a:srgbClr val="1B1B1F"/>
                           </a:solidFill>
@@ -9248,7 +9248,7 @@
                         </a:rPr>
                         <a:t>2</a:t>
                       </a:r>
-                      <a:endParaRPr lang="en-US" sz="1300" dirty="0">
+                      <a:endParaRPr lang="en-US" sz="1200" dirty="0">
                         <a:latin typeface="Calibri" charset="0"/>
                         <a:ea typeface="Calibri" charset="0"/>
                         <a:cs typeface="Calibri" charset="0"/>
@@ -9306,7 +9306,7 @@
                         <a:buNone/>
                       </a:pPr>
                       <a:r>
-                        <a:rPr lang="en-US" sz="1300" dirty="0">
+                        <a:rPr lang="en-US" sz="1200" dirty="0">
                           <a:solidFill>
                             <a:srgbClr val="1B1B1F"/>
                           </a:solidFill>
@@ -9316,7 +9316,7 @@
                         </a:rPr>
                         <a:t>ertyknrtyv</a:t>
                       </a:r>
-                      <a:endParaRPr lang="en-US" sz="1300" dirty="0">
+                      <a:endParaRPr lang="en-US" sz="1200" dirty="0">
                         <a:latin typeface="Calibri" charset="0"/>
                         <a:ea typeface="Calibri" charset="0"/>
                         <a:cs typeface="Calibri" charset="0"/>
@@ -9374,7 +9374,7 @@
                         <a:buNone/>
                       </a:pPr>
                       <a:r>
-                        <a:rPr lang="en-US" sz="1300" dirty="0">
+                        <a:rPr lang="en-US" sz="1200" dirty="0">
                           <a:solidFill>
                             <a:srgbClr val="1B1B1F"/>
                           </a:solidFill>
@@ -9384,7 +9384,7 @@
                         </a:rPr>
                         <a:t>15</a:t>
                       </a:r>
-                      <a:endParaRPr lang="en-US" sz="1300" dirty="0">
+                      <a:endParaRPr lang="en-US" sz="1200" dirty="0">
                         <a:latin typeface="Calibri" charset="0"/>
                         <a:ea typeface="Calibri" charset="0"/>
                         <a:cs typeface="Calibri" charset="0"/>
@@ -9442,7 +9442,7 @@
                         <a:buNone/>
                       </a:pPr>
                       <a:r>
-                        <a:rPr lang="en-US" sz="1300" dirty="0">
+                        <a:rPr lang="en-US" sz="1200" dirty="0">
                           <a:solidFill>
                             <a:srgbClr val="1B1B1F"/>
                           </a:solidFill>
@@ -9452,7 +9452,7 @@
                         </a:rPr>
                         <a:t>reglxaegli</a:t>
                       </a:r>
-                      <a:endParaRPr lang="en-US" sz="1300" dirty="0">
+                      <a:endParaRPr lang="en-US" sz="1200" dirty="0">
                         <a:latin typeface="Calibri" charset="0"/>
                         <a:ea typeface="Calibri" charset="0"/>
                         <a:cs typeface="Calibri" charset="0"/>
@@ -9512,7 +9512,7 @@
                         <a:buNone/>
                       </a:pPr>
                       <a:r>
-                        <a:rPr lang="en-US" sz="1300" dirty="0">
+                        <a:rPr lang="en-US" sz="1200" dirty="0">
                           <a:solidFill>
                             <a:srgbClr val="1B1B1F"/>
                           </a:solidFill>
@@ -9522,7 +9522,7 @@
                         </a:rPr>
                         <a:t>3</a:t>
                       </a:r>
-                      <a:endParaRPr lang="en-US" sz="1300" dirty="0">
+                      <a:endParaRPr lang="en-US" sz="1200" dirty="0">
                         <a:latin typeface="Calibri" charset="0"/>
                         <a:ea typeface="Calibri" charset="0"/>
                         <a:cs typeface="Calibri" charset="0"/>
@@ -9580,7 +9580,7 @@
                         <a:buNone/>
                       </a:pPr>
                       <a:r>
-                        <a:rPr lang="en-US" sz="1300" dirty="0">
+                        <a:rPr lang="en-US" sz="1200" dirty="0">
                           <a:solidFill>
                             <a:srgbClr val="1B1B1F"/>
                           </a:solidFill>
@@ -9590,7 +9590,7 @@
                         </a:rPr>
                         <a:t>dqsxjmqsxu</a:t>
                       </a:r>
-                      <a:endParaRPr lang="en-US" sz="1300" dirty="0">
+                      <a:endParaRPr lang="en-US" sz="1200" dirty="0">
                         <a:latin typeface="Calibri" charset="0"/>
                         <a:ea typeface="Calibri" charset="0"/>
                         <a:cs typeface="Calibri" charset="0"/>
@@ -9648,7 +9648,7 @@
                         <a:buNone/>
                       </a:pPr>
                       <a:r>
-                        <a:rPr lang="en-US" sz="1300" dirty="0">
+                        <a:rPr lang="en-US" sz="1200" dirty="0">
                           <a:solidFill>
                             <a:srgbClr val="1B1B1F"/>
                           </a:solidFill>
@@ -9658,7 +9658,7 @@
                         </a:rPr>
                         <a:t>16</a:t>
                       </a:r>
-                      <a:endParaRPr lang="en-US" sz="1300" dirty="0">
+                      <a:endParaRPr lang="en-US" sz="1200" dirty="0">
                         <a:latin typeface="Calibri" charset="0"/>
                         <a:ea typeface="Calibri" charset="0"/>
                         <a:cs typeface="Calibri" charset="0"/>
@@ -9716,7 +9716,7 @@
                         <a:buNone/>
                       </a:pPr>
                       <a:r>
-                        <a:rPr lang="en-US" sz="1300" dirty="0">
+                        <a:rPr lang="en-US" sz="1200" dirty="0">
                           <a:solidFill>
                             <a:srgbClr val="1B1B1F"/>
                           </a:solidFill>
@@ -9726,7 +9726,7 @@
                         </a:rPr>
                         <a:t>qdfkwzdfkh</a:t>
                       </a:r>
-                      <a:endParaRPr lang="en-US" sz="1300" dirty="0">
+                      <a:endParaRPr lang="en-US" sz="1200" dirty="0">
                         <a:latin typeface="Calibri" charset="0"/>
                         <a:ea typeface="Calibri" charset="0"/>
                         <a:cs typeface="Calibri" charset="0"/>
@@ -9786,7 +9786,7 @@
                         <a:buNone/>
                       </a:pPr>
                       <a:r>
-                        <a:rPr lang="en-US" sz="1300" dirty="0">
+                        <a:rPr lang="en-US" sz="1200" dirty="0">
                           <a:solidFill>
                             <a:srgbClr val="1B1B1F"/>
                           </a:solidFill>
@@ -9796,7 +9796,7 @@
                         </a:rPr>
                         <a:t>4</a:t>
                       </a:r>
-                      <a:endParaRPr lang="en-US" sz="1300" dirty="0">
+                      <a:endParaRPr lang="en-US" sz="1200" dirty="0">
                         <a:latin typeface="Calibri" charset="0"/>
                         <a:ea typeface="Calibri" charset="0"/>
                         <a:cs typeface="Calibri" charset="0"/>
@@ -9854,7 +9854,7 @@
                         <a:buNone/>
                       </a:pPr>
                       <a:r>
-                        <a:rPr lang="en-US" sz="1300" dirty="0">
+                        <a:rPr lang="en-US" sz="1200" dirty="0">
                           <a:solidFill>
                             <a:srgbClr val="1B1B1F"/>
                           </a:solidFill>
@@ -9864,7 +9864,7 @@
                         </a:rPr>
                         <a:t>cprwilprwt</a:t>
                       </a:r>
-                      <a:endParaRPr lang="en-US" sz="1300" dirty="0">
+                      <a:endParaRPr lang="en-US" sz="1200" dirty="0">
                         <a:latin typeface="Calibri" charset="0"/>
                         <a:ea typeface="Calibri" charset="0"/>
                         <a:cs typeface="Calibri" charset="0"/>
@@ -9922,7 +9922,7 @@
                         <a:buNone/>
                       </a:pPr>
                       <a:r>
-                        <a:rPr lang="en-US" sz="1300" dirty="0">
+                        <a:rPr lang="en-US" sz="1200" dirty="0">
                           <a:solidFill>
                             <a:srgbClr val="1B1B1F"/>
                           </a:solidFill>
@@ -9932,7 +9932,7 @@
                         </a:rPr>
                         <a:t>17</a:t>
                       </a:r>
-                      <a:endParaRPr lang="en-US" sz="1300" dirty="0">
+                      <a:endParaRPr lang="en-US" sz="1200" dirty="0">
                         <a:latin typeface="Calibri" charset="0"/>
                         <a:ea typeface="Calibri" charset="0"/>
                         <a:cs typeface="Calibri" charset="0"/>
@@ -9990,7 +9990,7 @@
                         <a:buNone/>
                       </a:pPr>
                       <a:r>
-                        <a:rPr lang="en-US" sz="1300" dirty="0">
+                        <a:rPr lang="en-US" sz="1200" dirty="0">
                           <a:solidFill>
                             <a:srgbClr val="1B1B1F"/>
                           </a:solidFill>
@@ -10000,7 +10000,7 @@
                         </a:rPr>
                         <a:t>pcejvycejg</a:t>
                       </a:r>
-                      <a:endParaRPr lang="en-US" sz="1300" dirty="0">
+                      <a:endParaRPr lang="en-US" sz="1200" dirty="0">
                         <a:latin typeface="Calibri" charset="0"/>
                         <a:ea typeface="Calibri" charset="0"/>
                         <a:cs typeface="Calibri" charset="0"/>
@@ -10060,7 +10060,7 @@
                         <a:buNone/>
                       </a:pPr>
                       <a:r>
-                        <a:rPr lang="en-US" sz="1300" dirty="0">
+                        <a:rPr lang="en-US" sz="1200" dirty="0">
                           <a:solidFill>
                             <a:srgbClr val="1B1B1F"/>
                           </a:solidFill>
@@ -10070,7 +10070,7 @@
                         </a:rPr>
                         <a:t>5</a:t>
                       </a:r>
-                      <a:endParaRPr lang="en-US" sz="1300" dirty="0">
+                      <a:endParaRPr lang="en-US" sz="1200" dirty="0">
                         <a:latin typeface="Calibri" charset="0"/>
                         <a:ea typeface="Calibri" charset="0"/>
                         <a:cs typeface="Calibri" charset="0"/>
@@ -10128,7 +10128,7 @@
                         <a:buNone/>
                       </a:pPr>
                       <a:r>
-                        <a:rPr lang="en-US" sz="1300" dirty="0">
+                        <a:rPr lang="en-US" sz="1200" dirty="0">
                           <a:solidFill>
                             <a:srgbClr val="1B1B1F"/>
                           </a:solidFill>
@@ -10138,7 +10138,7 @@
                         </a:rPr>
                         <a:t>boqvhkoqvs</a:t>
                       </a:r>
-                      <a:endParaRPr lang="en-US" sz="1300" dirty="0">
+                      <a:endParaRPr lang="en-US" sz="1200" dirty="0">
                         <a:latin typeface="Calibri" charset="0"/>
                         <a:ea typeface="Calibri" charset="0"/>
                         <a:cs typeface="Calibri" charset="0"/>
@@ -10196,7 +10196,7 @@
                         <a:buNone/>
                       </a:pPr>
                       <a:r>
-                        <a:rPr lang="en-US" sz="1300" dirty="0">
+                        <a:rPr lang="en-US" sz="1200" dirty="0">
                           <a:solidFill>
                             <a:srgbClr val="1B1B1F"/>
                           </a:solidFill>
@@ -10206,7 +10206,7 @@
                         </a:rPr>
                         <a:t>18</a:t>
                       </a:r>
-                      <a:endParaRPr lang="en-US" sz="1300" dirty="0">
+                      <a:endParaRPr lang="en-US" sz="1200" dirty="0">
                         <a:latin typeface="Calibri" charset="0"/>
                         <a:ea typeface="Calibri" charset="0"/>
                         <a:cs typeface="Calibri" charset="0"/>
@@ -10264,7 +10264,7 @@
                         <a:buNone/>
                       </a:pPr>
                       <a:r>
-                        <a:rPr lang="en-US" sz="1300" dirty="0">
+                        <a:rPr lang="en-US" sz="1200" dirty="0">
                           <a:solidFill>
                             <a:srgbClr val="1B1B1F"/>
                           </a:solidFill>
@@ -10274,7 +10274,7 @@
                         </a:rPr>
                         <a:t>obdiuxbdif</a:t>
                       </a:r>
-                      <a:endParaRPr lang="en-US" sz="1300" dirty="0">
+                      <a:endParaRPr lang="en-US" sz="1200" dirty="0">
                         <a:latin typeface="Calibri" charset="0"/>
                         <a:ea typeface="Calibri" charset="0"/>
                         <a:cs typeface="Calibri" charset="0"/>
@@ -10334,7 +10334,7 @@
                         <a:buNone/>
                       </a:pPr>
                       <a:r>
-                        <a:rPr lang="en-US" sz="1300" dirty="0">
+                        <a:rPr lang="en-US" sz="1200" dirty="0">
                           <a:solidFill>
                             <a:srgbClr val="1B1B1F"/>
                           </a:solidFill>
@@ -10344,7 +10344,7 @@
                         </a:rPr>
                         <a:t>6</a:t>
                       </a:r>
-                      <a:endParaRPr lang="en-US" sz="1300" dirty="0">
+                      <a:endParaRPr lang="en-US" sz="1200" dirty="0">
                         <a:latin typeface="Calibri" charset="0"/>
                         <a:ea typeface="Calibri" charset="0"/>
                         <a:cs typeface="Calibri" charset="0"/>
@@ -10402,7 +10402,7 @@
                         <a:buNone/>
                       </a:pPr>
                       <a:r>
-                        <a:rPr lang="en-US" sz="1300" dirty="0">
+                        <a:rPr lang="en-US" sz="1200" dirty="0">
                           <a:solidFill>
                             <a:srgbClr val="1B1B1F"/>
                           </a:solidFill>
@@ -10412,7 +10412,7 @@
                         </a:rPr>
                         <a:t>anpugjnpur</a:t>
                       </a:r>
-                      <a:endParaRPr lang="en-US" sz="1300" dirty="0">
+                      <a:endParaRPr lang="en-US" sz="1200" dirty="0">
                         <a:latin typeface="Calibri" charset="0"/>
                         <a:ea typeface="Calibri" charset="0"/>
                         <a:cs typeface="Calibri" charset="0"/>
@@ -10470,7 +10470,7 @@
                         <a:buNone/>
                       </a:pPr>
                       <a:r>
-                        <a:rPr lang="en-US" sz="1300" dirty="0">
+                        <a:rPr lang="en-US" sz="1200" dirty="0">
                           <a:solidFill>
                             <a:srgbClr val="1B1B1F"/>
                           </a:solidFill>
@@ -10480,7 +10480,7 @@
                         </a:rPr>
                         <a:t>19</a:t>
                       </a:r>
-                      <a:endParaRPr lang="en-US" sz="1300" dirty="0">
+                      <a:endParaRPr lang="en-US" sz="1200" dirty="0">
                         <a:latin typeface="Calibri" charset="0"/>
                         <a:ea typeface="Calibri" charset="0"/>
                         <a:cs typeface="Calibri" charset="0"/>
@@ -10538,7 +10538,7 @@
                         <a:buNone/>
                       </a:pPr>
                       <a:r>
-                        <a:rPr lang="en-US" sz="1300" b="1" dirty="0">
+                        <a:rPr lang="en-US" sz="1200" b="1" dirty="0">
                           <a:solidFill>
                             <a:srgbClr val="1B1B1F"/>
                           </a:solidFill>
@@ -10549,7 +10549,7 @@
                         <a:t>nachtwache</a:t>
                       </a:r>
                       <a:r>
-                        <a:rPr lang="en-US" sz="1300" dirty="0">
+                        <a:rPr lang="en-US" sz="1200" dirty="0">
                           <a:solidFill>
                             <a:srgbClr val="1B1B1F"/>
                           </a:solidFill>
@@ -10559,7 +10559,7 @@
                         </a:rPr>
                         <a:t> ✓</a:t>
                       </a:r>
-                      <a:endParaRPr lang="en-US" sz="1300" dirty="0">
+                      <a:endParaRPr lang="en-US" sz="1200" dirty="0">
                         <a:latin typeface="Calibri" charset="0"/>
                         <a:ea typeface="Calibri" charset="0"/>
                         <a:cs typeface="Calibri" charset="0"/>
@@ -10619,7 +10619,7 @@
                         <a:buNone/>
                       </a:pPr>
                       <a:r>
-                        <a:rPr lang="en-US" sz="1300" dirty="0">
+                        <a:rPr lang="en-US" sz="1200" dirty="0">
                           <a:solidFill>
                             <a:srgbClr val="1B1B1F"/>
                           </a:solidFill>
@@ -10629,7 +10629,7 @@
                         </a:rPr>
                         <a:t>7</a:t>
                       </a:r>
-                      <a:endParaRPr lang="en-US" sz="1300" dirty="0">
+                      <a:endParaRPr lang="en-US" sz="1200" dirty="0">
                         <a:latin typeface="Calibri" charset="0"/>
                         <a:ea typeface="Calibri" charset="0"/>
                         <a:cs typeface="Calibri" charset="0"/>
@@ -10687,7 +10687,7 @@
                         <a:buNone/>
                       </a:pPr>
                       <a:r>
-                        <a:rPr lang="en-US" sz="1300" dirty="0">
+                        <a:rPr lang="en-US" sz="1200" dirty="0">
                           <a:solidFill>
                             <a:srgbClr val="1B1B1F"/>
                           </a:solidFill>
@@ -10697,7 +10697,7 @@
                         </a:rPr>
                         <a:t>zmotfimotq</a:t>
                       </a:r>
-                      <a:endParaRPr lang="en-US" sz="1300" dirty="0">
+                      <a:endParaRPr lang="en-US" sz="1200" dirty="0">
                         <a:latin typeface="Calibri" charset="0"/>
                         <a:ea typeface="Calibri" charset="0"/>
                         <a:cs typeface="Calibri" charset="0"/>
@@ -10755,7 +10755,7 @@
                         <a:buNone/>
                       </a:pPr>
                       <a:r>
-                        <a:rPr lang="en-US" sz="1300" dirty="0">
+                        <a:rPr lang="en-US" sz="1200" dirty="0">
                           <a:solidFill>
                             <a:srgbClr val="1B1B1F"/>
                           </a:solidFill>
@@ -10765,7 +10765,7 @@
                         </a:rPr>
                         <a:t>20</a:t>
                       </a:r>
-                      <a:endParaRPr lang="en-US" sz="1300" dirty="0">
+                      <a:endParaRPr lang="en-US" sz="1200" dirty="0">
                         <a:latin typeface="Calibri" charset="0"/>
                         <a:ea typeface="Calibri" charset="0"/>
                         <a:cs typeface="Calibri" charset="0"/>
@@ -10823,7 +10823,7 @@
                         <a:buNone/>
                       </a:pPr>
                       <a:r>
-                        <a:rPr lang="en-US" sz="1300" dirty="0">
+                        <a:rPr lang="en-US" sz="1200" dirty="0">
                           <a:solidFill>
                             <a:srgbClr val="1B1B1F"/>
                           </a:solidFill>
@@ -10833,7 +10833,7 @@
                         </a:rPr>
                         <a:t>mzbgsvzbgd</a:t>
                       </a:r>
-                      <a:endParaRPr lang="en-US" sz="1300" dirty="0">
+                      <a:endParaRPr lang="en-US" sz="1200" dirty="0">
                         <a:latin typeface="Calibri" charset="0"/>
                         <a:ea typeface="Calibri" charset="0"/>
                         <a:cs typeface="Calibri" charset="0"/>
@@ -10893,7 +10893,7 @@
                         <a:buNone/>
                       </a:pPr>
                       <a:r>
-                        <a:rPr lang="en-US" sz="1300" dirty="0">
+                        <a:rPr lang="en-US" sz="1200" dirty="0">
                           <a:solidFill>
                             <a:srgbClr val="1B1B1F"/>
                           </a:solidFill>
@@ -10903,7 +10903,7 @@
                         </a:rPr>
                         <a:t>8</a:t>
                       </a:r>
-                      <a:endParaRPr lang="en-US" sz="1300" dirty="0">
+                      <a:endParaRPr lang="en-US" sz="1200" dirty="0">
                         <a:latin typeface="Calibri" charset="0"/>
                         <a:ea typeface="Calibri" charset="0"/>
                         <a:cs typeface="Calibri" charset="0"/>
@@ -10961,7 +10961,7 @@
                         <a:buNone/>
                       </a:pPr>
                       <a:r>
-                        <a:rPr lang="en-US" sz="1300" dirty="0">
+                        <a:rPr lang="en-US" sz="1200" dirty="0">
                           <a:solidFill>
                             <a:srgbClr val="1B1B1F"/>
                           </a:solidFill>
@@ -10971,7 +10971,7 @@
                         </a:rPr>
                         <a:t>ylnsehlnsp</a:t>
                       </a:r>
-                      <a:endParaRPr lang="en-US" sz="1300" dirty="0">
+                      <a:endParaRPr lang="en-US" sz="1200" dirty="0">
                         <a:latin typeface="Calibri" charset="0"/>
                         <a:ea typeface="Calibri" charset="0"/>
                         <a:cs typeface="Calibri" charset="0"/>
@@ -11029,7 +11029,7 @@
                         <a:buNone/>
                       </a:pPr>
                       <a:r>
-                        <a:rPr lang="en-US" sz="1300" dirty="0">
+                        <a:rPr lang="en-US" sz="1200" dirty="0">
                           <a:solidFill>
                             <a:srgbClr val="1B1B1F"/>
                           </a:solidFill>
@@ -11039,7 +11039,7 @@
                         </a:rPr>
                         <a:t>21</a:t>
                       </a:r>
-                      <a:endParaRPr lang="en-US" sz="1300" dirty="0">
+                      <a:endParaRPr lang="en-US" sz="1200" dirty="0">
                         <a:latin typeface="Calibri" charset="0"/>
                         <a:ea typeface="Calibri" charset="0"/>
                         <a:cs typeface="Calibri" charset="0"/>
@@ -11097,7 +11097,7 @@
                         <a:buNone/>
                       </a:pPr>
                       <a:r>
-                        <a:rPr lang="en-US" sz="1300" dirty="0">
+                        <a:rPr lang="en-US" sz="1200" dirty="0">
                           <a:solidFill>
                             <a:srgbClr val="1B1B1F"/>
                           </a:solidFill>
@@ -11107,7 +11107,7 @@
                         </a:rPr>
                         <a:t>lyafruyafc</a:t>
                       </a:r>
-                      <a:endParaRPr lang="en-US" sz="1300" dirty="0">
+                      <a:endParaRPr lang="en-US" sz="1200" dirty="0">
                         <a:latin typeface="Calibri" charset="0"/>
                         <a:ea typeface="Calibri" charset="0"/>
                         <a:cs typeface="Calibri" charset="0"/>
@@ -11167,7 +11167,7 @@
                         <a:buNone/>
                       </a:pPr>
                       <a:r>
-                        <a:rPr lang="en-US" sz="1300" dirty="0">
+                        <a:rPr lang="en-US" sz="1200" dirty="0">
                           <a:solidFill>
                             <a:srgbClr val="1B1B1F"/>
                           </a:solidFill>
@@ -11177,7 +11177,7 @@
                         </a:rPr>
                         <a:t>9</a:t>
                       </a:r>
-                      <a:endParaRPr lang="en-US" sz="1300" dirty="0">
+                      <a:endParaRPr lang="en-US" sz="1200" dirty="0">
                         <a:latin typeface="Calibri" charset="0"/>
                         <a:ea typeface="Calibri" charset="0"/>
                         <a:cs typeface="Calibri" charset="0"/>
@@ -11235,7 +11235,7 @@
                         <a:buNone/>
                       </a:pPr>
                       <a:r>
-                        <a:rPr lang="en-US" sz="1300" dirty="0">
+                        <a:rPr lang="en-US" sz="1200" dirty="0">
                           <a:solidFill>
                             <a:srgbClr val="1B1B1F"/>
                           </a:solidFill>
@@ -11245,7 +11245,7 @@
                         </a:rPr>
                         <a:t>xkmrdgkmro</a:t>
                       </a:r>
-                      <a:endParaRPr lang="en-US" sz="1300" dirty="0">
+                      <a:endParaRPr lang="en-US" sz="1200" dirty="0">
                         <a:latin typeface="Calibri" charset="0"/>
                         <a:ea typeface="Calibri" charset="0"/>
                         <a:cs typeface="Calibri" charset="0"/>
@@ -11303,7 +11303,7 @@
                         <a:buNone/>
                       </a:pPr>
                       <a:r>
-                        <a:rPr lang="en-US" sz="1300" dirty="0">
+                        <a:rPr lang="en-US" sz="1200" dirty="0">
                           <a:solidFill>
                             <a:srgbClr val="1B1B1F"/>
                           </a:solidFill>
@@ -11313,7 +11313,7 @@
                         </a:rPr>
                         <a:t>22</a:t>
                       </a:r>
-                      <a:endParaRPr lang="en-US" sz="1300" dirty="0">
+                      <a:endParaRPr lang="en-US" sz="1200" dirty="0">
                         <a:latin typeface="Calibri" charset="0"/>
                         <a:ea typeface="Calibri" charset="0"/>
                         <a:cs typeface="Calibri" charset="0"/>
@@ -11371,7 +11371,7 @@
                         <a:buNone/>
                       </a:pPr>
                       <a:r>
-                        <a:rPr lang="en-US" sz="1300" dirty="0">
+                        <a:rPr lang="en-US" sz="1200" dirty="0">
                           <a:solidFill>
                             <a:srgbClr val="1B1B1F"/>
                           </a:solidFill>
@@ -11381,7 +11381,7 @@
                         </a:rPr>
                         <a:t>kxzeqtxzeb</a:t>
                       </a:r>
-                      <a:endParaRPr lang="en-US" sz="1300" dirty="0">
+                      <a:endParaRPr lang="en-US" sz="1200" dirty="0">
                         <a:latin typeface="Calibri" charset="0"/>
                         <a:ea typeface="Calibri" charset="0"/>
                         <a:cs typeface="Calibri" charset="0"/>
@@ -11441,7 +11441,7 @@
                         <a:buNone/>
                       </a:pPr>
                       <a:r>
-                        <a:rPr lang="en-US" sz="1300" dirty="0">
+                        <a:rPr lang="en-US" sz="1200" dirty="0">
                           <a:solidFill>
                             <a:srgbClr val="1B1B1F"/>
                           </a:solidFill>
@@ -11451,7 +11451,7 @@
                         </a:rPr>
                         <a:t>10</a:t>
                       </a:r>
-                      <a:endParaRPr lang="en-US" sz="1300" dirty="0">
+                      <a:endParaRPr lang="en-US" sz="1200" dirty="0">
                         <a:latin typeface="Calibri" charset="0"/>
                         <a:ea typeface="Calibri" charset="0"/>
                         <a:cs typeface="Calibri" charset="0"/>
@@ -11509,7 +11509,7 @@
                         <a:buNone/>
                       </a:pPr>
                       <a:r>
-                        <a:rPr lang="en-US" sz="1300" dirty="0">
+                        <a:rPr lang="en-US" sz="1200" dirty="0">
                           <a:solidFill>
                             <a:srgbClr val="1B1B1F"/>
                           </a:solidFill>
@@ -11519,7 +11519,7 @@
                         </a:rPr>
                         <a:t>wjlqcfjlqn</a:t>
                       </a:r>
-                      <a:endParaRPr lang="en-US" sz="1300" dirty="0">
+                      <a:endParaRPr lang="en-US" sz="1200" dirty="0">
                         <a:latin typeface="Calibri" charset="0"/>
                         <a:ea typeface="Calibri" charset="0"/>
                         <a:cs typeface="Calibri" charset="0"/>
@@ -11577,7 +11577,7 @@
                         <a:buNone/>
                       </a:pPr>
                       <a:r>
-                        <a:rPr lang="en-US" sz="1300" dirty="0">
+                        <a:rPr lang="en-US" sz="1200" dirty="0">
                           <a:solidFill>
                             <a:srgbClr val="1B1B1F"/>
                           </a:solidFill>
@@ -11587,7 +11587,7 @@
                         </a:rPr>
                         <a:t>23</a:t>
                       </a:r>
-                      <a:endParaRPr lang="en-US" sz="1300" dirty="0">
+                      <a:endParaRPr lang="en-US" sz="1200" dirty="0">
                         <a:latin typeface="Calibri" charset="0"/>
                         <a:ea typeface="Calibri" charset="0"/>
                         <a:cs typeface="Calibri" charset="0"/>
@@ -11645,7 +11645,7 @@
                         <a:buNone/>
                       </a:pPr>
                       <a:r>
-                        <a:rPr lang="en-US" sz="1300" dirty="0">
+                        <a:rPr lang="en-US" sz="1200" dirty="0">
                           <a:solidFill>
                             <a:srgbClr val="1B1B1F"/>
                           </a:solidFill>
@@ -11655,7 +11655,7 @@
                         </a:rPr>
                         <a:t>jwydpswyda</a:t>
                       </a:r>
-                      <a:endParaRPr lang="en-US" sz="1300" dirty="0">
+                      <a:endParaRPr lang="en-US" sz="1200" dirty="0">
                         <a:latin typeface="Calibri" charset="0"/>
                         <a:ea typeface="Calibri" charset="0"/>
                         <a:cs typeface="Calibri" charset="0"/>
@@ -11715,7 +11715,7 @@
                         <a:buNone/>
                       </a:pPr>
                       <a:r>
-                        <a:rPr lang="en-US" sz="1300" dirty="0">
+                        <a:rPr lang="en-US" sz="1200" dirty="0">
                           <a:solidFill>
                             <a:srgbClr val="1B1B1F"/>
                           </a:solidFill>
@@ -11725,7 +11725,7 @@
                         </a:rPr>
                         <a:t>11</a:t>
                       </a:r>
-                      <a:endParaRPr lang="en-US" sz="1300" dirty="0">
+                      <a:endParaRPr lang="en-US" sz="1200" dirty="0">
                         <a:latin typeface="Calibri" charset="0"/>
                         <a:ea typeface="Calibri" charset="0"/>
                         <a:cs typeface="Calibri" charset="0"/>
@@ -11783,7 +11783,7 @@
                         <a:buNone/>
                       </a:pPr>
                       <a:r>
-                        <a:rPr lang="en-US" sz="1300" dirty="0">
+                        <a:rPr lang="en-US" sz="1200" dirty="0">
                           <a:solidFill>
                             <a:srgbClr val="1B1B1F"/>
                           </a:solidFill>
@@ -11793,7 +11793,7 @@
                         </a:rPr>
                         <a:t>vikpbeikpm</a:t>
                       </a:r>
-                      <a:endParaRPr lang="en-US" sz="1300" dirty="0">
+                      <a:endParaRPr lang="en-US" sz="1200" dirty="0">
                         <a:latin typeface="Calibri" charset="0"/>
                         <a:ea typeface="Calibri" charset="0"/>
                         <a:cs typeface="Calibri" charset="0"/>
@@ -11851,7 +11851,7 @@
                         <a:buNone/>
                       </a:pPr>
                       <a:r>
-                        <a:rPr lang="en-US" sz="1300" dirty="0">
+                        <a:rPr lang="en-US" sz="1200" dirty="0">
                           <a:solidFill>
                             <a:srgbClr val="1B1B1F"/>
                           </a:solidFill>
@@ -11861,7 +11861,7 @@
                         </a:rPr>
                         <a:t>24</a:t>
                       </a:r>
-                      <a:endParaRPr lang="en-US" sz="1300" dirty="0">
+                      <a:endParaRPr lang="en-US" sz="1200" dirty="0">
                         <a:latin typeface="Calibri" charset="0"/>
                         <a:ea typeface="Calibri" charset="0"/>
                         <a:cs typeface="Calibri" charset="0"/>
@@ -11919,7 +11919,7 @@
                         <a:buNone/>
                       </a:pPr>
                       <a:r>
-                        <a:rPr lang="en-US" sz="1300" dirty="0">
+                        <a:rPr lang="en-US" sz="1200" dirty="0">
                           <a:solidFill>
                             <a:srgbClr val="1B1B1F"/>
                           </a:solidFill>
@@ -11929,7 +11929,7 @@
                         </a:rPr>
                         <a:t>ivxcorvxcz</a:t>
                       </a:r>
-                      <a:endParaRPr lang="en-US" sz="1300" dirty="0">
+                      <a:endParaRPr lang="en-US" sz="1200" dirty="0">
                         <a:latin typeface="Calibri" charset="0"/>
                         <a:ea typeface="Calibri" charset="0"/>
                         <a:cs typeface="Calibri" charset="0"/>
@@ -11989,7 +11989,7 @@
                         <a:buNone/>
                       </a:pPr>
                       <a:r>
-                        <a:rPr lang="en-US" sz="1300" dirty="0">
+                        <a:rPr lang="en-US" sz="1200" dirty="0">
                           <a:solidFill>
                             <a:srgbClr val="1B1B1F"/>
                           </a:solidFill>
@@ -11999,7 +11999,7 @@
                         </a:rPr>
                         <a:t>12</a:t>
                       </a:r>
-                      <a:endParaRPr lang="en-US" sz="1300" dirty="0">
+                      <a:endParaRPr lang="en-US" sz="1200" dirty="0">
                         <a:latin typeface="Calibri" charset="0"/>
                         <a:ea typeface="Calibri" charset="0"/>
                         <a:cs typeface="Calibri" charset="0"/>
@@ -12057,7 +12057,7 @@
                         <a:buNone/>
                       </a:pPr>
                       <a:r>
-                        <a:rPr lang="en-US" sz="1300" dirty="0">
+                        <a:rPr lang="en-US" sz="1200" dirty="0">
                           <a:solidFill>
                             <a:srgbClr val="1B1B1F"/>
                           </a:solidFill>
@@ -12067,7 +12067,7 @@
                         </a:rPr>
                         <a:t>uhjoadhjol</a:t>
                       </a:r>
-                      <a:endParaRPr lang="en-US" sz="1300" dirty="0">
+                      <a:endParaRPr lang="en-US" sz="1200" dirty="0">
                         <a:latin typeface="Calibri" charset="0"/>
                         <a:ea typeface="Calibri" charset="0"/>
                         <a:cs typeface="Calibri" charset="0"/>
@@ -12125,7 +12125,7 @@
                         <a:buNone/>
                       </a:pPr>
                       <a:r>
-                        <a:rPr lang="en-US" sz="1300" dirty="0">
+                        <a:rPr lang="en-US" sz="1200" dirty="0">
                           <a:solidFill>
                             <a:srgbClr val="1B1B1F"/>
                           </a:solidFill>
@@ -12135,7 +12135,7 @@
                         </a:rPr>
                         <a:t>25</a:t>
                       </a:r>
-                      <a:endParaRPr lang="en-US" sz="1300" dirty="0">
+                      <a:endParaRPr lang="en-US" sz="1200" dirty="0">
                         <a:latin typeface="Calibri" charset="0"/>
                         <a:ea typeface="Calibri" charset="0"/>
                         <a:cs typeface="Calibri" charset="0"/>
@@ -12193,7 +12193,7 @@
                         <a:buNone/>
                       </a:pPr>
                       <a:r>
-                        <a:rPr lang="en-US" sz="1300" dirty="0">
+                        <a:rPr lang="en-US" sz="1200" dirty="0">
                           <a:solidFill>
                             <a:srgbClr val="1B1B1F"/>
                           </a:solidFill>
@@ -12203,7 +12203,7 @@
                         </a:rPr>
                         <a:t>huwbnquwby</a:t>
                       </a:r>
-                      <a:endParaRPr lang="en-US" sz="1300" dirty="0">
+                      <a:endParaRPr lang="en-US" sz="1200" dirty="0">
                         <a:latin typeface="Calibri" charset="0"/>
                         <a:ea typeface="Calibri" charset="0"/>
                         <a:cs typeface="Calibri" charset="0"/>
@@ -13560,7 +13560,7 @@
         <p:spPr>
           <a:xfrm>
             <a:off x="1097280" y="1508760"/>
-            <a:ext cx="9997135" cy="4663440"/>
+            <a:ext cx="6217920" cy="4663440"/>
           </a:xfrm>
           <a:prstGeom prst="roundRect">
             <a:avLst>
@@ -13626,7 +13626,7 @@
         <p:spPr>
           <a:xfrm>
             <a:off x="1508760" y="2240280"/>
-            <a:ext cx="9174175" cy="727456"/>
+            <a:ext cx="5394960" cy="541528"/>
           </a:xfrm>
           <a:prstGeom prst="rect">
             <a:avLst/>
@@ -13642,7 +13642,7 @@
               <a:buNone/>
             </a:pPr>
             <a:r>
-              <a:rPr lang="en-US" sz="2200" dirty="0">
+              <a:rPr lang="en-US" sz="1600" dirty="0">
                 <a:solidFill>
                   <a:srgbClr val="1B1B1F"/>
                 </a:solidFill>
@@ -13650,14 +13650,14 @@
               <a:t>Caesar ersetzt jeden Buchstaben durch den, der k Stellen weiter steht: </a:t>
             </a:r>
             <a:r>
-              <a:rPr lang="en-US" sz="2200" b="1" dirty="0">
+              <a:rPr lang="en-US" sz="1600" b="1" dirty="0">
                 <a:solidFill>
                   <a:srgbClr val="1B1B1F"/>
                 </a:solidFill>
               </a:rPr>
               <a:t>monoalphabetische Substitution</a:t>
             </a:r>
-            <a:endParaRPr lang="en-US" sz="2200" dirty="0"/>
+            <a:endParaRPr lang="en-US" sz="1600" dirty="0"/>
           </a:p>
         </p:txBody>
       </p:sp>
@@ -13669,8 +13669,8 @@
         </p:nvSpPr>
         <p:spPr>
           <a:xfrm>
-            <a:off x="1508760" y="3095752"/>
-            <a:ext cx="9174175" cy="727456"/>
+            <a:off x="1508760" y="2909824"/>
+            <a:ext cx="5394960" cy="541528"/>
           </a:xfrm>
           <a:prstGeom prst="rect">
             <a:avLst/>
@@ -13686,7 +13686,7 @@
               <a:buNone/>
             </a:pPr>
             <a:r>
-              <a:rPr lang="en-US" sz="2200" dirty="0">
+              <a:rPr lang="en-US" sz="1600" dirty="0">
                 <a:solidFill>
                   <a:srgbClr val="1B1B1F"/>
                 </a:solidFill>
@@ -13694,7 +13694,7 @@
               <a:t>Gerechnet wird mit </a:t>
             </a:r>
             <a:r>
-              <a:rPr lang="en-US" sz="2200" b="1" dirty="0">
+              <a:rPr lang="en-US" sz="1600" b="1" dirty="0">
                 <a:solidFill>
                   <a:srgbClr val="1B1B1F"/>
                 </a:solidFill>
@@ -13702,14 +13702,14 @@
               <a:t>A = 1 … Z = 26</a:t>
             </a:r>
             <a:r>
-              <a:rPr lang="en-US" sz="2200" dirty="0">
+              <a:rPr lang="en-US" sz="1600" dirty="0">
                 <a:solidFill>
                   <a:srgbClr val="1B1B1F"/>
                 </a:solidFill>
               </a:rPr>
               <a:t>: c = ((p + k − 1) mod 26) + 1 – jedes Ergebnis liegt zwischen 1 und 26</a:t>
             </a:r>
-            <a:endParaRPr lang="en-US" sz="2200" dirty="0"/>
+            <a:endParaRPr lang="en-US" sz="1600" dirty="0"/>
           </a:p>
         </p:txBody>
       </p:sp>
@@ -13721,8 +13721,8 @@
         </p:nvSpPr>
         <p:spPr>
           <a:xfrm>
-            <a:off x="1508760" y="3951224"/>
-            <a:ext cx="9174175" cy="727456"/>
+            <a:off x="1508760" y="3579368"/>
+            <a:ext cx="5394960" cy="541528"/>
           </a:xfrm>
           <a:prstGeom prst="rect">
             <a:avLst/>
@@ -13738,7 +13738,7 @@
               <a:buNone/>
             </a:pPr>
             <a:r>
-              <a:rPr lang="en-US" sz="2200" b="1" dirty="0">
+              <a:rPr lang="en-US" sz="1600" b="1" dirty="0">
                 <a:solidFill>
                   <a:srgbClr val="1B1B1F"/>
                 </a:solidFill>
@@ -13746,7 +13746,7 @@
               <a:t>mod</a:t>
             </a:r>
             <a:r>
-              <a:rPr lang="en-US" sz="2200" dirty="0">
+              <a:rPr lang="en-US" sz="1600" dirty="0">
                 <a:solidFill>
                   <a:srgbClr val="1B1B1F"/>
                 </a:solidFill>
@@ -13754,7 +13754,7 @@
               <a:t> = kleinster nicht negativer Rest; entschlüsseln = zurück verschieben (</a:t>
             </a:r>
             <a:r>
-              <a:rPr lang="en-US" sz="2200" b="1" dirty="0">
+              <a:rPr lang="en-US" sz="1600" b="1" dirty="0">
                 <a:solidFill>
                   <a:srgbClr val="1B1B1F"/>
                 </a:solidFill>
@@ -13762,14 +13762,14 @@
               <a:t>− k</a:t>
             </a:r>
             <a:r>
-              <a:rPr lang="en-US" sz="2200" dirty="0">
+              <a:rPr lang="en-US" sz="1600" dirty="0">
                 <a:solidFill>
                   <a:srgbClr val="1B1B1F"/>
                 </a:solidFill>
               </a:rPr>
               <a:t>)</a:t>
             </a:r>
-            <a:endParaRPr lang="en-US" sz="2200" dirty="0"/>
+            <a:endParaRPr lang="en-US" sz="1600" dirty="0"/>
           </a:p>
         </p:txBody>
       </p:sp>
@@ -13781,8 +13781,8 @@
         </p:nvSpPr>
         <p:spPr>
           <a:xfrm>
-            <a:off x="1508760" y="4806696"/>
-            <a:ext cx="9174175" cy="727456"/>
+            <a:off x="1508760" y="4248912"/>
+            <a:ext cx="5394960" cy="789432"/>
           </a:xfrm>
           <a:prstGeom prst="rect">
             <a:avLst/>
@@ -13798,7 +13798,7 @@
               <a:buNone/>
             </a:pPr>
             <a:r>
-              <a:rPr lang="en-US" sz="2200" dirty="0">
+              <a:rPr lang="en-US" sz="1600" dirty="0">
                 <a:solidFill>
                   <a:srgbClr val="1B1B1F"/>
                 </a:solidFill>
@@ -13806,7 +13806,7 @@
               <a:t>Nur </a:t>
             </a:r>
             <a:r>
-              <a:rPr lang="en-US" sz="2200" b="1" dirty="0">
+              <a:rPr lang="en-US" sz="1600" b="1" dirty="0">
                 <a:solidFill>
                   <a:srgbClr val="1B1B1F"/>
                 </a:solidFill>
@@ -13814,7 +13814,7 @@
               <a:t>25</a:t>
             </a:r>
             <a:r>
-              <a:rPr lang="en-US" sz="2200" dirty="0">
+              <a:rPr lang="en-US" sz="1600" dirty="0">
                 <a:solidFill>
                   <a:srgbClr val="1B1B1F"/>
                 </a:solidFill>
@@ -13822,7 +13822,7 @@
               <a:t> sinnvolle Schlüssel → Brute Force gelingt → </a:t>
             </a:r>
             <a:r>
-              <a:rPr lang="en-US" sz="2200" b="1" dirty="0">
+              <a:rPr lang="en-US" sz="1600" b="1" dirty="0">
                 <a:solidFill>
                   <a:srgbClr val="1B1B1F"/>
                 </a:solidFill>
@@ -13830,14 +13830,14 @@
               <a:t>unsicher</a:t>
             </a:r>
             <a:r>
-              <a:rPr lang="en-US" sz="2200" dirty="0">
+              <a:rPr lang="en-US" sz="1600" dirty="0">
                 <a:solidFill>
                   <a:srgbClr val="1B1B1F"/>
                 </a:solidFill>
               </a:rPr>
               <a:t> (Kerckhoffs: Sicherheit nur durch den Schlüssel)</a:t>
             </a:r>
-            <a:endParaRPr lang="en-US" sz="2200" dirty="0"/>
+            <a:endParaRPr lang="en-US" sz="1600" dirty="0"/>
           </a:p>
         </p:txBody>
       </p:sp>
@@ -15453,7 +15453,7 @@
             <a:r>
               <a:rPr lang="en-US" sz="1300" b="1" spc="200" kern="0" dirty="0">
                 <a:solidFill>
-                  <a:srgbClr val="B5523B"/>
+                  <a:srgbClr val="14213D"/>
                 </a:solidFill>
               </a:rPr>
               <a:t>KRYPTOLOGIE</a:t>
@@ -21994,7 +21994,7 @@
             <a:r>
               <a:rPr lang="en-US" sz="1300" b="1" spc="200" kern="0" dirty="0">
                 <a:solidFill>
-                  <a:srgbClr val="B5523B"/>
+                  <a:srgbClr val="14213D"/>
                 </a:solidFill>
               </a:rPr>
               <a:t>RECHNEN</a:t>
@@ -22486,76 +22486,30 @@
           </a:p>
         </p:txBody>
       </p:sp>
-      <p:sp>
-        <p:nvSpPr>
-          <p:cNvPr id="4" name="Bildplatzhalter"/>
-          <p:cNvSpPr/>
+      <p:pic>
+        <p:nvPicPr>
+          <p:cNvPr id="4" name="Image 0" descr="Ziffernring/Uhr mit 12 Stunden, Pfeil von 10 um 5 Schritte weiter auf 3 (Messing-Linien, Kryptos-Stil); daneben Alphabetring A … Z mit Pfeil von U um 6 weiter auf A">    </p:cNvPr>
+          <p:cNvPicPr>
+            <a:picLocks noChangeAspect="1"/>
+          </p:cNvPicPr>
           <p:nvPr/>
-        </p:nvSpPr>
+        </p:nvPicPr>
+        <p:blipFill>
+          <a:blip r:embed="rId1"/>
+          <a:stretch>
+            <a:fillRect/>
+          </a:stretch>
+        </p:blipFill>
         <p:spPr>
           <a:xfrm>
-            <a:off x="548640" y="4297172"/>
-            <a:ext cx="7315200" cy="1463040"/>
+            <a:off x="2511255" y="4297172"/>
+            <a:ext cx="3389971" cy="1737360"/>
           </a:xfrm>
           <a:prstGeom prst="rect">
             <a:avLst/>
           </a:prstGeom>
-          <a:solidFill>
-            <a:srgbClr val="FFFFFF"/>
-          </a:solidFill>
-          <a:ln w="15875">
-            <a:solidFill>
-              <a:srgbClr val="4A4A55"/>
-            </a:solidFill>
-            <a:prstDash val="dash"/>
-          </a:ln>
         </p:spPr>
-      </p:sp>
-      <p:sp>
-        <p:nvSpPr>
-          <p:cNvPr id="5" name="Text 3"/>
-          <p:cNvSpPr txBox="1"/>
-          <p:nvPr/>
-        </p:nvSpPr>
-        <p:spPr>
-          <a:xfrm>
-            <a:off x="822960" y="4571492"/>
-            <a:ext cx="6766560" cy="914400"/>
-          </a:xfrm>
-          <a:prstGeom prst="rect">
-            <a:avLst/>
-          </a:prstGeom>
-          <a:noFill/>
-          <a:ln/>
-        </p:spPr>
-        <p:txBody>
-          <a:bodyPr wrap="square" lIns="0" tIns="0" rIns="0" bIns="0" rtlCol="0" anchor="ctr"/>
-          <a:lstStyle/>
-          <a:p>
-            <a:pPr algn="ctr" indent="0" marL="0">
-              <a:buNone/>
-            </a:pPr>
-            <a:r>
-              <a:rPr lang="en-US" sz="1400" b="1" spc="200" kern="0" dirty="0">
-                <a:solidFill>
-                  <a:srgbClr val="4A4A55"/>
-                </a:solidFill>
-              </a:rPr>
-              <a:t>BILD EINFÜGEN
-</a:t>
-            </a:r>
-            <a:r>
-              <a:rPr lang="en-US" sz="1400" dirty="0">
-                <a:solidFill>
-                  <a:srgbClr val="4A4A55"/>
-                </a:solidFill>
-              </a:rPr>
-              <a:t>Ziffernring/Uhr mit 12 Stunden, Pfeil von 10 um 5 Schritte weiter auf 3 (Messing-Linien, Kryptos-Stil); daneben Alphabetring A … Z mit Pfeil von U um 6 weiter auf A</a:t>
-            </a:r>
-            <a:endParaRPr lang="en-US" sz="1400" dirty="0"/>
-          </a:p>
-        </p:txBody>
-      </p:sp>
+      </p:pic>
       <p:sp>
         <p:nvSpPr>
           <p:cNvPr id="25" name="Slide Number Placeholder 0"/>
@@ -23100,7 +23054,7 @@
         <p:spPr>
           <a:xfrm>
             <a:off x="548640" y="1325880"/>
-            <a:ext cx="11094415" cy="432308"/>
+            <a:ext cx="7315200" cy="711200"/>
           </a:xfrm>
           <a:prstGeom prst="rect">
             <a:avLst/>
@@ -23116,14 +23070,14 @@
               <a:buNone/>
             </a:pPr>
             <a:r>
-              <a:rPr lang="en-US" sz="2200" dirty="0">
+              <a:rPr lang="en-US" sz="2000" dirty="0">
                 <a:solidFill>
                   <a:srgbClr val="1B1B1F"/>
                 </a:solidFill>
               </a:rPr>
               <a:t>Nach jeder Rechnung prüfen: Liegt das Ergebnis zwischen 1 und 26?</a:t>
             </a:r>
-            <a:endParaRPr lang="en-US" sz="2200" dirty="0"/>
+            <a:endParaRPr lang="en-US" sz="2000" dirty="0"/>
           </a:p>
         </p:txBody>
       </p:sp>
@@ -23135,12 +23089,12 @@
         </p:nvSpPr>
         <p:spPr>
           <a:xfrm>
-            <a:off x="548640" y="1941068"/>
-            <a:ext cx="5364328" cy="3139948"/>
+            <a:off x="548640" y="2219960"/>
+            <a:ext cx="3474720" cy="3480816"/>
           </a:xfrm>
           <a:prstGeom prst="roundRect">
             <a:avLst>
-              <a:gd name="adj" fmla="val 2330"/>
+              <a:gd name="adj" fmla="val 2105"/>
             </a:avLst>
           </a:prstGeom>
           <a:solidFill>
@@ -23162,8 +23116,8 @@
         </p:nvSpPr>
         <p:spPr>
           <a:xfrm>
-            <a:off x="822960" y="2123948"/>
-            <a:ext cx="4815688" cy="365760"/>
+            <a:off x="822960" y="2402840"/>
+            <a:ext cx="2926080" cy="365760"/>
           </a:xfrm>
           <a:prstGeom prst="rect">
             <a:avLst/>
@@ -23198,8 +23152,8 @@
         </p:nvSpPr>
         <p:spPr>
           <a:xfrm>
-            <a:off x="822960" y="2626868"/>
-            <a:ext cx="4815688" cy="386588"/>
+            <a:off x="822960" y="2905760"/>
+            <a:ext cx="2926080" cy="386588"/>
           </a:xfrm>
           <a:prstGeom prst="rect">
             <a:avLst/>
@@ -23234,8 +23188,8 @@
         </p:nvSpPr>
         <p:spPr>
           <a:xfrm>
-            <a:off x="822960" y="3141472"/>
-            <a:ext cx="4815688" cy="727456"/>
+            <a:off x="822960" y="3420364"/>
+            <a:ext cx="2926080" cy="727456"/>
           </a:xfrm>
           <a:prstGeom prst="rect">
             <a:avLst/>
@@ -23286,8 +23240,8 @@
         </p:nvSpPr>
         <p:spPr>
           <a:xfrm>
-            <a:off x="822960" y="3996944"/>
-            <a:ext cx="4815688" cy="727456"/>
+            <a:off x="822960" y="4275836"/>
+            <a:ext cx="2926080" cy="1068324"/>
           </a:xfrm>
           <a:prstGeom prst="rect">
             <a:avLst/>
@@ -23338,12 +23292,12 @@
         </p:nvSpPr>
         <p:spPr>
           <a:xfrm>
-            <a:off x="6278728" y="1941068"/>
-            <a:ext cx="5364328" cy="3139948"/>
+            <a:off x="4389120" y="2219960"/>
+            <a:ext cx="3474720" cy="3952240"/>
           </a:xfrm>
           <a:prstGeom prst="roundRect">
             <a:avLst>
-              <a:gd name="adj" fmla="val 2330"/>
+              <a:gd name="adj" fmla="val 2105"/>
             </a:avLst>
           </a:prstGeom>
           <a:solidFill>
@@ -23365,8 +23319,8 @@
         </p:nvSpPr>
         <p:spPr>
           <a:xfrm>
-            <a:off x="6553048" y="2123948"/>
-            <a:ext cx="4815688" cy="365760"/>
+            <a:off x="4663440" y="2402840"/>
+            <a:ext cx="2926080" cy="365760"/>
           </a:xfrm>
           <a:prstGeom prst="rect">
             <a:avLst/>
@@ -23401,8 +23355,8 @@
         </p:nvSpPr>
         <p:spPr>
           <a:xfrm>
-            <a:off x="6553048" y="2626868"/>
-            <a:ext cx="4815688" cy="727456"/>
+            <a:off x="4663440" y="2905760"/>
+            <a:ext cx="2926080" cy="975360"/>
           </a:xfrm>
           <a:prstGeom prst="rect">
             <a:avLst/>
@@ -23418,7 +23372,7 @@
               <a:buNone/>
             </a:pPr>
             <a:r>
-              <a:rPr lang="en-US" sz="2200" dirty="0">
+              <a:rPr lang="en-US" sz="2000" dirty="0">
                 <a:solidFill>
                   <a:srgbClr val="1B1B1F"/>
                 </a:solidFill>
@@ -23426,7 +23380,7 @@
               <a:t>Rest 0 bedeutet </a:t>
             </a:r>
             <a:r>
-              <a:rPr lang="en-US" sz="2200" b="1" dirty="0">
+              <a:rPr lang="en-US" sz="2000" b="1" dirty="0">
                 <a:solidFill>
                   <a:srgbClr val="1B1B1F"/>
                 </a:solidFill>
@@ -23434,14 +23388,14 @@
               <a:t>Z</a:t>
             </a:r>
             <a:r>
-              <a:rPr lang="en-US" sz="2200" dirty="0">
+              <a:rPr lang="en-US" sz="2000" dirty="0">
                 <a:solidFill>
                   <a:srgbClr val="1B1B1F"/>
                 </a:solidFill>
               </a:rPr>
               <a:t> (26) – oder gleich die Formel mit − 1 / + 1</a:t>
             </a:r>
-            <a:endParaRPr lang="en-US" sz="2200" dirty="0"/>
+            <a:endParaRPr lang="en-US" sz="2000" dirty="0"/>
           </a:p>
         </p:txBody>
       </p:sp>
@@ -23453,8 +23407,8 @@
         </p:nvSpPr>
         <p:spPr>
           <a:xfrm>
-            <a:off x="6553048" y="3482340"/>
-            <a:ext cx="4815688" cy="386588"/>
+            <a:off x="4663440" y="4009136"/>
+            <a:ext cx="2926080" cy="665480"/>
           </a:xfrm>
           <a:prstGeom prst="rect">
             <a:avLst/>
@@ -23470,7 +23424,7 @@
               <a:buNone/>
             </a:pPr>
             <a:r>
-              <a:rPr lang="en-US" sz="2200" dirty="0">
+              <a:rPr lang="en-US" sz="2000" dirty="0">
                 <a:solidFill>
                   <a:srgbClr val="1B1B1F"/>
                 </a:solidFill>
@@ -23478,7 +23432,7 @@
               <a:t>Negativ: </a:t>
             </a:r>
             <a:r>
-              <a:rPr lang="en-US" sz="2200" b="1" dirty="0">
+              <a:rPr lang="en-US" sz="2000" b="1" dirty="0">
                 <a:solidFill>
                   <a:srgbClr val="1B1B1F"/>
                 </a:solidFill>
@@ -23486,14 +23440,14 @@
               <a:t>+ 26</a:t>
             </a:r>
             <a:r>
-              <a:rPr lang="en-US" sz="2200" dirty="0">
+              <a:rPr lang="en-US" sz="2000" dirty="0">
                 <a:solidFill>
                   <a:srgbClr val="1B1B1F"/>
                 </a:solidFill>
               </a:rPr>
               <a:t> → −5 + 26 = 21 → u</a:t>
             </a:r>
-            <a:endParaRPr lang="en-US" sz="2200" dirty="0"/>
+            <a:endParaRPr lang="en-US" sz="2000" dirty="0"/>
           </a:p>
         </p:txBody>
       </p:sp>
@@ -23505,8 +23459,8 @@
         </p:nvSpPr>
         <p:spPr>
           <a:xfrm>
-            <a:off x="6553048" y="3996944"/>
-            <a:ext cx="4815688" cy="727456"/>
+            <a:off x="4663440" y="4802632"/>
+            <a:ext cx="2926080" cy="665480"/>
           </a:xfrm>
           <a:prstGeom prst="rect">
             <a:avLst/>
@@ -23522,7 +23476,7 @@
               <a:buNone/>
             </a:pPr>
             <a:r>
-              <a:rPr lang="en-US" sz="2200" dirty="0">
+              <a:rPr lang="en-US" sz="2000" dirty="0">
                 <a:solidFill>
                   <a:srgbClr val="1B1B1F"/>
                 </a:solidFill>
@@ -23530,14 +23484,14 @@
               <a:t>Jedes Ergebnis liegt zwischen </a:t>
             </a:r>
             <a:r>
-              <a:rPr lang="en-US" sz="2200" b="1" dirty="0">
+              <a:rPr lang="en-US" sz="2000" b="1" dirty="0">
                 <a:solidFill>
                   <a:srgbClr val="1B1B1F"/>
                 </a:solidFill>
               </a:rPr>
               <a:t>1 und 26</a:t>
             </a:r>
-            <a:endParaRPr lang="en-US" sz="2200" dirty="0"/>
+            <a:endParaRPr lang="en-US" sz="2000" dirty="0"/>
           </a:p>
         </p:txBody>
       </p:sp>

--- a/materialien/Videos/01_Caesar_und_Modulo/KR_Video_01_Caesar_und_Modulo_Folien.pptx
+++ b/materialien/Videos/01_Caesar_und_Modulo/KR_Video_01_Caesar_und_Modulo_Folien.pptx
@@ -124,71 +124,71 @@
   <p:extLst>
     <p:ext uri="{521415D9-36F7-43E2-AB2F-B90AF26B5E84}">
       <p14:sectionLst xmlns:p14="http://schemas.microsoft.com/office/powerpoint/2010/main">
-        <p14:section name="Einstieg" id="{bac56459-1ad3-03d0-05d7-e35f41227c78}">
+        <p14:section name="Einstieg" id="{915937c7-788f-9154-0b1b-41485cf0c8f1}">
           <p14:sldIdLst>
             <p14:sldId id="256"/>
             <p14:sldId id="257"/>
           </p14:sldIdLst>
         </p14:section>
-        <p14:section name="Grundbegriffe" id="{77c766e0-cad6-1878-930d-3a57b4738ca9}">
+        <p14:section name="Grundbegriffe" id="{30c2dbac-cad4-7d25-96a1-743539eb0fe7}">
           <p14:sldIdLst>
             <p14:sldId id="258"/>
           </p14:sldIdLst>
         </p14:section>
-        <p14:section name="Das Caesar-Verfahren" id="{ab05d00c-3e2c-abe0-ba65-c298609c6414}">
+        <p14:section name="Das Caesar-Verfahren" id="{e0c0d2e8-7028-e70e-d723-b781efc53cf4}">
           <p14:sldIdLst>
             <p14:sldId id="259"/>
             <p14:sldId id="260"/>
           </p14:sldIdLst>
         </p14:section>
-        <p14:section name="Alphabet A = 1" id="{d9193ba8-cd0d-44bf-1003-5b4eca8d9862}">
+        <p14:section name="Alphabet A = 1" id="{fc4b0279-bd98-a23d-5ae8-86e57082fd02}">
           <p14:sldIdLst>
             <p14:sldId id="261"/>
           </p14:sldIdLst>
         </p14:section>
-        <p14:section name="Verschlüsseln" id="{5228d014-ee48-ca47-135f-dff4eb4367b7}">
+        <p14:section name="Verschlüsseln" id="{2b561f2c-ed96-529f-6363-36216cab3e0c}">
           <p14:sldIdLst>
             <p14:sldId id="262"/>
           </p14:sldIdLst>
         </p14:section>
-        <p14:section name="Modulo" id="{c1f3248b-08bb-26e7-916f-a314b14112da}">
+        <p14:section name="Modulo" id="{836158dd-768a-cab7-61e5-df3b6b7cc616}">
           <p14:sldIdLst>
             <p14:sldId id="263"/>
           </p14:sldIdLst>
         </p14:section>
-        <p14:section name="Die Formel" id="{8e9a1c97-b4fd-214c-110b-33498e39735d}">
+        <p14:section name="Die Formel" id="{56cdd578-dac0-e13d-46ce-39c796dabd25}">
           <p14:sldIdLst>
             <p14:sldId id="264"/>
           </p14:sldIdLst>
         </p14:section>
-        <p14:section name="Fallen beim Rechnen" id="{01609b9c-32fb-265b-d5ee-3a1883ef61b8}">
+        <p14:section name="Fallen beim Rechnen" id="{aec43483-a61d-02fc-4895-169d9368ba66}">
           <p14:sldIdLst>
             <p14:sldId id="265"/>
           </p14:sldIdLst>
         </p14:section>
-        <p14:section name="Selbst ausprobieren" id="{eeecea2b-2a5f-4f23-e5df-423d19b57afc}">
+        <p14:section name="Selbst ausprobieren" id="{e1982438-bcd9-cf28-7cb0-944cfd8c39b0}">
           <p14:sldIdLst>
             <p14:sldId id="266"/>
             <p14:sldId id="267"/>
             <p14:sldId id="268"/>
           </p14:sldIdLst>
         </p14:section>
-        <p14:section name="Brute Force" id="{60376e5f-e23d-0814-09fe-d7ddf01b1f1d}">
+        <p14:section name="Brute Force" id="{da72648a-5598-bbbd-75f6-a61446f6c478}">
           <p14:sldIdLst>
             <p14:sldId id="269"/>
           </p14:sldIdLst>
         </p14:section>
-        <p14:section name="Sicherheit beurteilen" id="{89af4771-902e-febf-3cd6-182da28f24f8}">
+        <p14:section name="Sicherheit beurteilen" id="{18de6843-60e4-928d-09de-b542814f4621}">
           <p14:sldIdLst>
             <p14:sldId id="270"/>
           </p14:sldIdLst>
         </p14:section>
-        <p14:section name="Typische Fehler" id="{22738dac-4e90-ad3c-bcbd-f38eaa92ee0f}">
+        <p14:section name="Typische Fehler" id="{b05a1eca-578f-7834-9f7c-40b1d43f329a}">
           <p14:sldIdLst>
             <p14:sldId id="271"/>
           </p14:sldIdLst>
         </p14:section>
-        <p14:section name="Zusammenfassung" id="{3dde1ce3-fa24-e0bc-ca77-56bdd189f7c0}">
+        <p14:section name="Zusammenfassung" id="{b87f1838-6555-62c1-0e3c-cb291b23276e}">
           <p14:sldIdLst>
             <p14:sldId id="272"/>
             <p14:sldId id="273"/>
@@ -16807,7 +16807,7 @@
       </p:sp>
       <p:pic>
         <p:nvPicPr>
-          <p:cNvPr id="3" name="Image 0" descr="Kryptolabor, Werkzeug „Chiffrierscheibe“: Messingscheibe mit Klartext außen, Papierscheibe mit Geheimtext innen, Nabe „a → D · Verschiebung 3“; unten rechts die Namensnennung.">    </p:cNvPr>
+          <p:cNvPr id="3" name="Image 0" descr="Kryptolabor, Werkzeug „Chiffrierscheibe“: Messingscheibe mit Klartext außen, Papierscheibe mit Geheimtext innen, Nabe „a → D · Verschiebung 3“; Namensnennung als Bildunterschrift.">    </p:cNvPr>
           <p:cNvPicPr>
             <a:picLocks noChangeAspect="1"/>
           </p:cNvPicPr>
@@ -16821,8 +16821,8 @@
         </p:blipFill>
         <p:spPr>
           <a:xfrm>
-            <a:off x="548640" y="1325880"/>
-            <a:ext cx="5003597" cy="2814523"/>
+            <a:off x="1332452" y="1325880"/>
+            <a:ext cx="3435972" cy="4206240"/>
           </a:xfrm>
           <a:prstGeom prst="rect">
             <a:avLst/>
@@ -16837,7 +16837,7 @@
         </p:nvSpPr>
         <p:spPr>
           <a:xfrm>
-            <a:off x="548640" y="4176979"/>
+            <a:off x="548640" y="5568696"/>
             <a:ext cx="5003597" cy="274320"/>
           </a:xfrm>
           <a:prstGeom prst="rect">
